--- a/(7.21) 전투가 있는 밸런스 문서.pptx
+++ b/(7.21) 전투가 있는 밸런스 문서.pptx
@@ -13,7 +13,6 @@
     <p:sldId id="263" r:id="rId7"/>
     <p:sldId id="264" r:id="rId8"/>
     <p:sldId id="261" r:id="rId9"/>
-    <p:sldId id="265" r:id="rId10"/>
   </p:sldIdLst>
   <p:sldSz cx="12192000" cy="6858000"/>
   <p:notesSz cx="6858000" cy="9144000"/>
@@ -262,7 +261,7 @@
           <a:p>
             <a:fld id="{48602DBF-5012-4FE4-B011-C917D1554ABD}" type="datetimeFigureOut">
               <a:rPr lang="ko-KR" altLang="en-US" smtClean="0"/>
-              <a:t>2026-07-21</a:t>
+              <a:t>2026-07-23</a:t>
             </a:fld>
             <a:endParaRPr lang="ko-KR" altLang="en-US"/>
           </a:p>
@@ -432,7 +431,7 @@
           <a:p>
             <a:fld id="{48602DBF-5012-4FE4-B011-C917D1554ABD}" type="datetimeFigureOut">
               <a:rPr lang="ko-KR" altLang="en-US" smtClean="0"/>
-              <a:t>2026-07-21</a:t>
+              <a:t>2026-07-23</a:t>
             </a:fld>
             <a:endParaRPr lang="ko-KR" altLang="en-US"/>
           </a:p>
@@ -612,7 +611,7 @@
           <a:p>
             <a:fld id="{48602DBF-5012-4FE4-B011-C917D1554ABD}" type="datetimeFigureOut">
               <a:rPr lang="ko-KR" altLang="en-US" smtClean="0"/>
-              <a:t>2026-07-21</a:t>
+              <a:t>2026-07-23</a:t>
             </a:fld>
             <a:endParaRPr lang="ko-KR" altLang="en-US"/>
           </a:p>
@@ -782,7 +781,7 @@
           <a:p>
             <a:fld id="{48602DBF-5012-4FE4-B011-C917D1554ABD}" type="datetimeFigureOut">
               <a:rPr lang="ko-KR" altLang="en-US" smtClean="0"/>
-              <a:t>2026-07-21</a:t>
+              <a:t>2026-07-23</a:t>
             </a:fld>
             <a:endParaRPr lang="ko-KR" altLang="en-US"/>
           </a:p>
@@ -1028,7 +1027,7 @@
           <a:p>
             <a:fld id="{48602DBF-5012-4FE4-B011-C917D1554ABD}" type="datetimeFigureOut">
               <a:rPr lang="ko-KR" altLang="en-US" smtClean="0"/>
-              <a:t>2026-07-21</a:t>
+              <a:t>2026-07-23</a:t>
             </a:fld>
             <a:endParaRPr lang="ko-KR" altLang="en-US"/>
           </a:p>
@@ -1260,7 +1259,7 @@
           <a:p>
             <a:fld id="{48602DBF-5012-4FE4-B011-C917D1554ABD}" type="datetimeFigureOut">
               <a:rPr lang="ko-KR" altLang="en-US" smtClean="0"/>
-              <a:t>2026-07-21</a:t>
+              <a:t>2026-07-23</a:t>
             </a:fld>
             <a:endParaRPr lang="ko-KR" altLang="en-US"/>
           </a:p>
@@ -1627,7 +1626,7 @@
           <a:p>
             <a:fld id="{48602DBF-5012-4FE4-B011-C917D1554ABD}" type="datetimeFigureOut">
               <a:rPr lang="ko-KR" altLang="en-US" smtClean="0"/>
-              <a:t>2026-07-21</a:t>
+              <a:t>2026-07-23</a:t>
             </a:fld>
             <a:endParaRPr lang="ko-KR" altLang="en-US"/>
           </a:p>
@@ -1745,7 +1744,7 @@
           <a:p>
             <a:fld id="{48602DBF-5012-4FE4-B011-C917D1554ABD}" type="datetimeFigureOut">
               <a:rPr lang="ko-KR" altLang="en-US" smtClean="0"/>
-              <a:t>2026-07-21</a:t>
+              <a:t>2026-07-23</a:t>
             </a:fld>
             <a:endParaRPr lang="ko-KR" altLang="en-US"/>
           </a:p>
@@ -1840,7 +1839,7 @@
           <a:p>
             <a:fld id="{48602DBF-5012-4FE4-B011-C917D1554ABD}" type="datetimeFigureOut">
               <a:rPr lang="ko-KR" altLang="en-US" smtClean="0"/>
-              <a:t>2026-07-21</a:t>
+              <a:t>2026-07-23</a:t>
             </a:fld>
             <a:endParaRPr lang="ko-KR" altLang="en-US"/>
           </a:p>
@@ -2117,7 +2116,7 @@
           <a:p>
             <a:fld id="{48602DBF-5012-4FE4-B011-C917D1554ABD}" type="datetimeFigureOut">
               <a:rPr lang="ko-KR" altLang="en-US" smtClean="0"/>
-              <a:t>2026-07-21</a:t>
+              <a:t>2026-07-23</a:t>
             </a:fld>
             <a:endParaRPr lang="ko-KR" altLang="en-US"/>
           </a:p>
@@ -2370,7 +2369,7 @@
           <a:p>
             <a:fld id="{48602DBF-5012-4FE4-B011-C917D1554ABD}" type="datetimeFigureOut">
               <a:rPr lang="ko-KR" altLang="en-US" smtClean="0"/>
-              <a:t>2026-07-21</a:t>
+              <a:t>2026-07-23</a:t>
             </a:fld>
             <a:endParaRPr lang="ko-KR" altLang="en-US"/>
           </a:p>
@@ -2583,7 +2582,7 @@
           <a:p>
             <a:fld id="{48602DBF-5012-4FE4-B011-C917D1554ABD}" type="datetimeFigureOut">
               <a:rPr lang="ko-KR" altLang="en-US" smtClean="0"/>
-              <a:t>2026-07-21</a:t>
+              <a:t>2026-07-23</a:t>
             </a:fld>
             <a:endParaRPr lang="ko-KR" altLang="en-US"/>
           </a:p>
@@ -3921,74 +3920,6 @@
 </p:sld>
 </file>
 
-<file path=ppt/slides/slide9.xml><?xml version="1.0" encoding="utf-8"?>
-<p:sld xmlns:a="http://schemas.openxmlformats.org/drawingml/2006/main" xmlns:r="http://schemas.openxmlformats.org/officeDocument/2006/relationships" xmlns:p="http://schemas.openxmlformats.org/presentationml/2006/main">
-  <p:cSld>
-    <p:spTree>
-      <p:nvGrpSpPr>
-        <p:cNvPr id="1" name=""/>
-        <p:cNvGrpSpPr/>
-        <p:nvPr/>
-      </p:nvGrpSpPr>
-      <p:grpSpPr>
-        <a:xfrm>
-          <a:off x="0" y="0"/>
-          <a:ext cx="0" cy="0"/>
-          <a:chOff x="0" y="0"/>
-          <a:chExt cx="0" cy="0"/>
-        </a:xfrm>
-      </p:grpSpPr>
-      <p:sp>
-        <p:nvSpPr>
-          <p:cNvPr id="2" name="제목 1"/>
-          <p:cNvSpPr>
-            <a:spLocks noGrp="1"/>
-          </p:cNvSpPr>
-          <p:nvPr>
-            <p:ph type="title"/>
-          </p:nvPr>
-        </p:nvSpPr>
-        <p:spPr/>
-        <p:txBody>
-          <a:bodyPr/>
-          <a:lstStyle/>
-          <a:p>
-            <a:endParaRPr lang="ko-KR" altLang="en-US"/>
-          </a:p>
-        </p:txBody>
-      </p:sp>
-      <p:sp>
-        <p:nvSpPr>
-          <p:cNvPr id="3" name="내용 개체 틀 2"/>
-          <p:cNvSpPr>
-            <a:spLocks noGrp="1"/>
-          </p:cNvSpPr>
-          <p:nvPr>
-            <p:ph idx="1"/>
-          </p:nvPr>
-        </p:nvSpPr>
-        <p:spPr/>
-        <p:txBody>
-          <a:bodyPr/>
-          <a:lstStyle/>
-          <a:p>
-            <a:endParaRPr lang="ko-KR" altLang="en-US"/>
-          </a:p>
-        </p:txBody>
-      </p:sp>
-    </p:spTree>
-    <p:extLst>
-      <p:ext uri="{BB962C8B-B14F-4D97-AF65-F5344CB8AC3E}">
-        <p14:creationId xmlns:p14="http://schemas.microsoft.com/office/powerpoint/2010/main" val="3845200549"/>
-      </p:ext>
-    </p:extLst>
-  </p:cSld>
-  <p:clrMapOvr>
-    <a:masterClrMapping/>
-  </p:clrMapOvr>
-</p:sld>
-</file>
-
 <file path=ppt/theme/theme1.xml><?xml version="1.0" encoding="utf-8"?>
 <a:theme xmlns:a="http://schemas.openxmlformats.org/drawingml/2006/main" name="Office 테마">
   <a:themeElements>
